--- a/AirZeta_Branch_User_Guide_EN.pptx
+++ b/AirZeta_Branch_User_Guide_EN.pptx
@@ -5416,7 +5416,7 @@
               </a:defRPr>
             </a:pPr>
             <a:r>
-              <a:t>- View the global security level map</a:t>
+              <a:t>- View the global security level map (centered on ICN/Korea)</a:t>
             </a:r>
           </a:p>
           <a:p>
@@ -5465,6 +5465,38 @@
             </a:pPr>
             <a:r>
               <a:t>- Scroll to zoom, drag to pan, double-click to zoom in</a:t>
+            </a:r>
+          </a:p>
+          <a:p>
+            <a:pPr lvl="1">
+              <a:spcBef>
+                <a:spcPts val="300"/>
+              </a:spcBef>
+              <a:defRPr sz="1200">
+                <a:solidFill>
+                  <a:srgbClr val="E8EAED"/>
+                </a:solidFill>
+                <a:latin typeface="Malgun Gothic"/>
+              </a:defRPr>
+            </a:pPr>
+            <a:r>
+              <a:t>- Markers stay the same size when you zoom in for precise viewing</a:t>
+            </a:r>
+          </a:p>
+          <a:p>
+            <a:pPr lvl="1">
+              <a:spcBef>
+                <a:spcPts val="300"/>
+              </a:spcBef>
+              <a:defRPr sz="1200">
+                <a:solidFill>
+                  <a:srgbClr val="E8EAED"/>
+                </a:solidFill>
+                <a:latin typeface="Malgun Gothic"/>
+              </a:defRPr>
+            </a:pPr>
+            <a:r>
+              <a:t>- Zoom always centers on your mouse pointer location</a:t>
             </a:r>
           </a:p>
           <a:p>
